--- a/tests/OfficeAgent.Tests/Corpus/v1.0.0/native/inputs/p-insertslide.pptx
+++ b/tests/OfficeAgent.Tests/Corpus/v1.0.0/native/inputs/p-insertslide.pptx
@@ -2,10 +2,10 @@
 <file path=ppt/presentation.xml><?xml version="1.0" encoding="utf-8"?>
 <p:presentation xmlns:p="http://schemas.openxmlformats.org/presentationml/2006/main">
   <p:sldMasterIdLst>
-    <p:sldMasterId xmlns:r="http://schemas.openxmlformats.org/officeDocument/2006/relationships" id="2147483648" r:id="R7782438183704112"/>
+    <p:sldMasterId xmlns:r="http://schemas.openxmlformats.org/officeDocument/2006/relationships" id="2147483648" r:id="R883e0a6179cc4a18"/>
   </p:sldMasterIdLst>
   <p:sldIdLst>
-    <p:sldId xmlns:r="http://schemas.openxmlformats.org/officeDocument/2006/relationships" id="256" r:id="R3d88f2d9e1814e0f"/>
+    <p:sldId xmlns:r="http://schemas.openxmlformats.org/officeDocument/2006/relationships" id="256" r:id="R7bff18b6dd574b7e"/>
   </p:sldIdLst>
   <p:sldSz cx="12192000" cy="6858000"/>
   <p:notesSz cx="6858000" cy="9144000"/>
@@ -386,11 +386,11 @@
   </p:cSld>
   <p:clrMap bg1="lt1" tx1="dk1" bg2="lt2" tx2="dk2" accent1="accent1" accent2="accent2" accent3="accent3" accent4="accent4" accent5="accent5" accent6="accent6" hlink="hlink" folHlink="folHlink"/>
   <p:sldLayoutIdLst>
-    <p:sldLayoutId xmlns:r="http://schemas.openxmlformats.org/officeDocument/2006/relationships" id="2147483649" r:id="Rc0e8bd61ad1b48a4"/>
-    <p:sldLayoutId xmlns:r="http://schemas.openxmlformats.org/officeDocument/2006/relationships" id="2147483650" r:id="R66c3ae14284849cf"/>
-    <p:sldLayoutId xmlns:r="http://schemas.openxmlformats.org/officeDocument/2006/relationships" id="2147483651" r:id="R76c48c4d65dc478e"/>
-    <p:sldLayoutId xmlns:r="http://schemas.openxmlformats.org/officeDocument/2006/relationships" id="2147483652" r:id="Rf7d335143a224e34"/>
-    <p:sldLayoutId xmlns:r="http://schemas.openxmlformats.org/officeDocument/2006/relationships" id="2147483653" r:id="R39c395da42d34eb3"/>
+    <p:sldLayoutId xmlns:r="http://schemas.openxmlformats.org/officeDocument/2006/relationships" id="2147483649" r:id="R151c23ad8ebd4518"/>
+    <p:sldLayoutId xmlns:r="http://schemas.openxmlformats.org/officeDocument/2006/relationships" id="2147483650" r:id="Rf527a49731c64ba6"/>
+    <p:sldLayoutId xmlns:r="http://schemas.openxmlformats.org/officeDocument/2006/relationships" id="2147483651" r:id="Rb11f25a000424305"/>
+    <p:sldLayoutId xmlns:r="http://schemas.openxmlformats.org/officeDocument/2006/relationships" id="2147483652" r:id="R947a75c4a67d44a6"/>
+    <p:sldLayoutId xmlns:r="http://schemas.openxmlformats.org/officeDocument/2006/relationships" id="2147483653" r:id="R117e2b3ff59a4f2c"/>
   </p:sldLayoutIdLst>
 </p:sldMaster>
 </file>

--- a/tests/OfficeAgent.Tests/Corpus/v1.0.0/native/inputs/p-insertslide.pptx
+++ b/tests/OfficeAgent.Tests/Corpus/v1.0.0/native/inputs/p-insertslide.pptx
@@ -2,10 +2,10 @@
 <file path=ppt/presentation.xml><?xml version="1.0" encoding="utf-8"?>
 <p:presentation xmlns:p="http://schemas.openxmlformats.org/presentationml/2006/main">
   <p:sldMasterIdLst>
-    <p:sldMasterId xmlns:r="http://schemas.openxmlformats.org/officeDocument/2006/relationships" id="2147483648" r:id="R883e0a6179cc4a18"/>
+    <p:sldMasterId xmlns:r="http://schemas.openxmlformats.org/officeDocument/2006/relationships" id="2147483648" r:id="Rf31e48a3b5404bce"/>
   </p:sldMasterIdLst>
   <p:sldIdLst>
-    <p:sldId xmlns:r="http://schemas.openxmlformats.org/officeDocument/2006/relationships" id="256" r:id="R7bff18b6dd574b7e"/>
+    <p:sldId xmlns:r="http://schemas.openxmlformats.org/officeDocument/2006/relationships" id="256" r:id="R7c7db8ab108b4da8"/>
   </p:sldIdLst>
   <p:sldSz cx="12192000" cy="6858000"/>
   <p:notesSz cx="6858000" cy="9144000"/>
@@ -386,11 +386,11 @@
   </p:cSld>
   <p:clrMap bg1="lt1" tx1="dk1" bg2="lt2" tx2="dk2" accent1="accent1" accent2="accent2" accent3="accent3" accent4="accent4" accent5="accent5" accent6="accent6" hlink="hlink" folHlink="folHlink"/>
   <p:sldLayoutIdLst>
-    <p:sldLayoutId xmlns:r="http://schemas.openxmlformats.org/officeDocument/2006/relationships" id="2147483649" r:id="R151c23ad8ebd4518"/>
-    <p:sldLayoutId xmlns:r="http://schemas.openxmlformats.org/officeDocument/2006/relationships" id="2147483650" r:id="Rf527a49731c64ba6"/>
-    <p:sldLayoutId xmlns:r="http://schemas.openxmlformats.org/officeDocument/2006/relationships" id="2147483651" r:id="Rb11f25a000424305"/>
-    <p:sldLayoutId xmlns:r="http://schemas.openxmlformats.org/officeDocument/2006/relationships" id="2147483652" r:id="R947a75c4a67d44a6"/>
-    <p:sldLayoutId xmlns:r="http://schemas.openxmlformats.org/officeDocument/2006/relationships" id="2147483653" r:id="R117e2b3ff59a4f2c"/>
+    <p:sldLayoutId xmlns:r="http://schemas.openxmlformats.org/officeDocument/2006/relationships" id="2147483649" r:id="Ra8d2ab0cb7b4486b"/>
+    <p:sldLayoutId xmlns:r="http://schemas.openxmlformats.org/officeDocument/2006/relationships" id="2147483650" r:id="R940440199166428a"/>
+    <p:sldLayoutId xmlns:r="http://schemas.openxmlformats.org/officeDocument/2006/relationships" id="2147483651" r:id="R0d8ba153feac4fbb"/>
+    <p:sldLayoutId xmlns:r="http://schemas.openxmlformats.org/officeDocument/2006/relationships" id="2147483652" r:id="Rf4d15c99977a4c12"/>
+    <p:sldLayoutId xmlns:r="http://schemas.openxmlformats.org/officeDocument/2006/relationships" id="2147483653" r:id="Re0344be48e1343c3"/>
   </p:sldLayoutIdLst>
 </p:sldMaster>
 </file>

--- a/tests/OfficeAgent.Tests/Corpus/v1.0.0/native/inputs/p-insertslide.pptx
+++ b/tests/OfficeAgent.Tests/Corpus/v1.0.0/native/inputs/p-insertslide.pptx
@@ -2,10 +2,10 @@
 <file path=ppt/presentation.xml><?xml version="1.0" encoding="utf-8"?>
 <p:presentation xmlns:p="http://schemas.openxmlformats.org/presentationml/2006/main">
   <p:sldMasterIdLst>
-    <p:sldMasterId xmlns:r="http://schemas.openxmlformats.org/officeDocument/2006/relationships" id="2147483648" r:id="Rf31e48a3b5404bce"/>
+    <p:sldMasterId xmlns:r="http://schemas.openxmlformats.org/officeDocument/2006/relationships" id="2147483648" r:id="R0f101b12b93542c5"/>
   </p:sldMasterIdLst>
   <p:sldIdLst>
-    <p:sldId xmlns:r="http://schemas.openxmlformats.org/officeDocument/2006/relationships" id="256" r:id="R7c7db8ab108b4da8"/>
+    <p:sldId xmlns:r="http://schemas.openxmlformats.org/officeDocument/2006/relationships" id="256" r:id="R7ed590944796448a"/>
   </p:sldIdLst>
   <p:sldSz cx="12192000" cy="6858000"/>
   <p:notesSz cx="6858000" cy="9144000"/>
@@ -386,11 +386,11 @@
   </p:cSld>
   <p:clrMap bg1="lt1" tx1="dk1" bg2="lt2" tx2="dk2" accent1="accent1" accent2="accent2" accent3="accent3" accent4="accent4" accent5="accent5" accent6="accent6" hlink="hlink" folHlink="folHlink"/>
   <p:sldLayoutIdLst>
-    <p:sldLayoutId xmlns:r="http://schemas.openxmlformats.org/officeDocument/2006/relationships" id="2147483649" r:id="Ra8d2ab0cb7b4486b"/>
-    <p:sldLayoutId xmlns:r="http://schemas.openxmlformats.org/officeDocument/2006/relationships" id="2147483650" r:id="R940440199166428a"/>
-    <p:sldLayoutId xmlns:r="http://schemas.openxmlformats.org/officeDocument/2006/relationships" id="2147483651" r:id="R0d8ba153feac4fbb"/>
-    <p:sldLayoutId xmlns:r="http://schemas.openxmlformats.org/officeDocument/2006/relationships" id="2147483652" r:id="Rf4d15c99977a4c12"/>
-    <p:sldLayoutId xmlns:r="http://schemas.openxmlformats.org/officeDocument/2006/relationships" id="2147483653" r:id="Re0344be48e1343c3"/>
+    <p:sldLayoutId xmlns:r="http://schemas.openxmlformats.org/officeDocument/2006/relationships" id="2147483649" r:id="R45922fd1ef3c4553"/>
+    <p:sldLayoutId xmlns:r="http://schemas.openxmlformats.org/officeDocument/2006/relationships" id="2147483650" r:id="R6699307ac9c84fc8"/>
+    <p:sldLayoutId xmlns:r="http://schemas.openxmlformats.org/officeDocument/2006/relationships" id="2147483651" r:id="Ra66f4fcd39b64ec0"/>
+    <p:sldLayoutId xmlns:r="http://schemas.openxmlformats.org/officeDocument/2006/relationships" id="2147483652" r:id="R48a2c6a6c1d04d9e"/>
+    <p:sldLayoutId xmlns:r="http://schemas.openxmlformats.org/officeDocument/2006/relationships" id="2147483653" r:id="R20304b5d41f34e3c"/>
   </p:sldLayoutIdLst>
 </p:sldMaster>
 </file>

--- a/tests/OfficeAgent.Tests/Corpus/v1.0.0/native/inputs/p-insertslide.pptx
+++ b/tests/OfficeAgent.Tests/Corpus/v1.0.0/native/inputs/p-insertslide.pptx
@@ -2,10 +2,10 @@
 <file path=ppt/presentation.xml><?xml version="1.0" encoding="utf-8"?>
 <p:presentation xmlns:p="http://schemas.openxmlformats.org/presentationml/2006/main">
   <p:sldMasterIdLst>
-    <p:sldMasterId xmlns:r="http://schemas.openxmlformats.org/officeDocument/2006/relationships" id="2147483648" r:id="R0f101b12b93542c5"/>
+    <p:sldMasterId xmlns:r="http://schemas.openxmlformats.org/officeDocument/2006/relationships" id="2147483648" r:id="Ra879f1ca9ad54731"/>
   </p:sldMasterIdLst>
   <p:sldIdLst>
-    <p:sldId xmlns:r="http://schemas.openxmlformats.org/officeDocument/2006/relationships" id="256" r:id="R7ed590944796448a"/>
+    <p:sldId xmlns:r="http://schemas.openxmlformats.org/officeDocument/2006/relationships" id="256" r:id="Rf96d7289a20b41eb"/>
   </p:sldIdLst>
   <p:sldSz cx="12192000" cy="6858000"/>
   <p:notesSz cx="6858000" cy="9144000"/>
@@ -386,11 +386,11 @@
   </p:cSld>
   <p:clrMap bg1="lt1" tx1="dk1" bg2="lt2" tx2="dk2" accent1="accent1" accent2="accent2" accent3="accent3" accent4="accent4" accent5="accent5" accent6="accent6" hlink="hlink" folHlink="folHlink"/>
   <p:sldLayoutIdLst>
-    <p:sldLayoutId xmlns:r="http://schemas.openxmlformats.org/officeDocument/2006/relationships" id="2147483649" r:id="R45922fd1ef3c4553"/>
-    <p:sldLayoutId xmlns:r="http://schemas.openxmlformats.org/officeDocument/2006/relationships" id="2147483650" r:id="R6699307ac9c84fc8"/>
-    <p:sldLayoutId xmlns:r="http://schemas.openxmlformats.org/officeDocument/2006/relationships" id="2147483651" r:id="Ra66f4fcd39b64ec0"/>
-    <p:sldLayoutId xmlns:r="http://schemas.openxmlformats.org/officeDocument/2006/relationships" id="2147483652" r:id="R48a2c6a6c1d04d9e"/>
-    <p:sldLayoutId xmlns:r="http://schemas.openxmlformats.org/officeDocument/2006/relationships" id="2147483653" r:id="R20304b5d41f34e3c"/>
+    <p:sldLayoutId xmlns:r="http://schemas.openxmlformats.org/officeDocument/2006/relationships" id="2147483649" r:id="Rfac66b6dac37448e"/>
+    <p:sldLayoutId xmlns:r="http://schemas.openxmlformats.org/officeDocument/2006/relationships" id="2147483650" r:id="R08146f534ea6459f"/>
+    <p:sldLayoutId xmlns:r="http://schemas.openxmlformats.org/officeDocument/2006/relationships" id="2147483651" r:id="Rca51e91b46a04f61"/>
+    <p:sldLayoutId xmlns:r="http://schemas.openxmlformats.org/officeDocument/2006/relationships" id="2147483652" r:id="Rf5c18a43a44c46e1"/>
+    <p:sldLayoutId xmlns:r="http://schemas.openxmlformats.org/officeDocument/2006/relationships" id="2147483653" r:id="Re16f6625df224265"/>
   </p:sldLayoutIdLst>
 </p:sldMaster>
 </file>

--- a/tests/OfficeAgent.Tests/Corpus/v1.0.0/native/inputs/p-insertslide.pptx
+++ b/tests/OfficeAgent.Tests/Corpus/v1.0.0/native/inputs/p-insertslide.pptx
@@ -2,10 +2,10 @@
 <file path=ppt/presentation.xml><?xml version="1.0" encoding="utf-8"?>
 <p:presentation xmlns:p="http://schemas.openxmlformats.org/presentationml/2006/main">
   <p:sldMasterIdLst>
-    <p:sldMasterId xmlns:r="http://schemas.openxmlformats.org/officeDocument/2006/relationships" id="2147483648" r:id="Ra879f1ca9ad54731"/>
+    <p:sldMasterId xmlns:r="http://schemas.openxmlformats.org/officeDocument/2006/relationships" id="2147483648" r:id="R2525219a9d6a4a79"/>
   </p:sldMasterIdLst>
   <p:sldIdLst>
-    <p:sldId xmlns:r="http://schemas.openxmlformats.org/officeDocument/2006/relationships" id="256" r:id="Rf96d7289a20b41eb"/>
+    <p:sldId xmlns:r="http://schemas.openxmlformats.org/officeDocument/2006/relationships" id="256" r:id="Rf52ef83a04974830"/>
   </p:sldIdLst>
   <p:sldSz cx="12192000" cy="6858000"/>
   <p:notesSz cx="6858000" cy="9144000"/>
@@ -386,11 +386,11 @@
   </p:cSld>
   <p:clrMap bg1="lt1" tx1="dk1" bg2="lt2" tx2="dk2" accent1="accent1" accent2="accent2" accent3="accent3" accent4="accent4" accent5="accent5" accent6="accent6" hlink="hlink" folHlink="folHlink"/>
   <p:sldLayoutIdLst>
-    <p:sldLayoutId xmlns:r="http://schemas.openxmlformats.org/officeDocument/2006/relationships" id="2147483649" r:id="Rfac66b6dac37448e"/>
-    <p:sldLayoutId xmlns:r="http://schemas.openxmlformats.org/officeDocument/2006/relationships" id="2147483650" r:id="R08146f534ea6459f"/>
-    <p:sldLayoutId xmlns:r="http://schemas.openxmlformats.org/officeDocument/2006/relationships" id="2147483651" r:id="Rca51e91b46a04f61"/>
-    <p:sldLayoutId xmlns:r="http://schemas.openxmlformats.org/officeDocument/2006/relationships" id="2147483652" r:id="Rf5c18a43a44c46e1"/>
-    <p:sldLayoutId xmlns:r="http://schemas.openxmlformats.org/officeDocument/2006/relationships" id="2147483653" r:id="Re16f6625df224265"/>
+    <p:sldLayoutId xmlns:r="http://schemas.openxmlformats.org/officeDocument/2006/relationships" id="2147483649" r:id="R2a36a7a890a246f7"/>
+    <p:sldLayoutId xmlns:r="http://schemas.openxmlformats.org/officeDocument/2006/relationships" id="2147483650" r:id="Rfaebb70728fd48aa"/>
+    <p:sldLayoutId xmlns:r="http://schemas.openxmlformats.org/officeDocument/2006/relationships" id="2147483651" r:id="Rffdef34e00e8461b"/>
+    <p:sldLayoutId xmlns:r="http://schemas.openxmlformats.org/officeDocument/2006/relationships" id="2147483652" r:id="R5e180d775fb34bf9"/>
+    <p:sldLayoutId xmlns:r="http://schemas.openxmlformats.org/officeDocument/2006/relationships" id="2147483653" r:id="Rab3f590f67b94642"/>
   </p:sldLayoutIdLst>
 </p:sldMaster>
 </file>
